--- a/examples/icon-grid-card.pptx
+++ b/examples/icon-grid-card.pptx
@@ -1049,72 +1049,39 @@
           </a:p>
         </p:txBody>
       </p:sp>
-      <p:sp>
-        <p:nvSpPr>
-          <p:cNvPr id="9" name="Shape 7"/>
-          <p:cNvSpPr/>
-          <p:nvPr/>
-        </p:nvSpPr>
+      <p:pic>
+        <p:nvPicPr>
+          <p:cNvPr id="9" name="Image 0" descr="preencoded.png">    </p:cNvPr>
+          <p:cNvPicPr>
+            <a:picLocks noChangeAspect="1"/>
+          </p:cNvPicPr>
+          <p:nvPr/>
+        </p:nvPicPr>
+        <p:blipFill>
+          <a:blip r:embed="rId1">
+            <a:extLst>
+              <a:ext uri="{96DAC541-7B7A-43D3-8B79-37D633B846F1}">
+                <asvg:svgBlip xmlns:asvg="http://schemas.microsoft.com/office/drawing/2016/SVG/main" r:embed="rId2"/>
+              </a:ext>
+            </a:extLst>
+          </a:blip>
+          <a:stretch>
+            <a:fillRect/>
+          </a:stretch>
+        </p:blipFill>
         <p:spPr>
           <a:xfrm>
             <a:off x="1930400" y="3181350"/>
             <a:ext cx="685800" cy="685800"/>
           </a:xfrm>
-          <a:prstGeom prst="roundRect">
-            <a:avLst/>
-          </a:prstGeom>
-          <a:solidFill>
-            <a:srgbClr val="FFFFFF">
-              <a:alpha val="15000"/>
-            </a:srgbClr>
-          </a:solidFill>
-          <a:ln w="12700">
-            <a:solidFill>
-              <a:srgbClr val="FFFFFF"/>
-            </a:solidFill>
-            <a:prstDash val="dash"/>
-          </a:ln>
-        </p:spPr>
-      </p:sp>
-      <p:sp>
-        <p:nvSpPr>
-          <p:cNvPr id="10" name="Text 8"/>
-          <p:cNvSpPr/>
-          <p:nvPr/>
-        </p:nvSpPr>
-        <p:spPr>
-          <a:xfrm>
-            <a:off x="1930400" y="3181350"/>
-            <a:ext cx="685800" cy="685800"/>
-          </a:xfrm>
-          <a:prstGeom prst="rect">
-            <a:avLst/>
-          </a:prstGeom>
-          <a:noFill/>
-          <a:ln/>
-        </p:spPr>
-        <p:txBody>
-          <a:bodyPr wrap="square" rtlCol="0" anchor="ctr"/>
-          <a:lstStyle/>
-          <a:p>
-            <a:pPr algn="ctr" indent="0" marL="0">
-              <a:buNone/>
-            </a:pPr>
-            <a:r>
-              <a:rPr lang="en-US" sz="800" dirty="0">
-                <a:solidFill>
-                  <a:srgbClr val="FFFFFF"/>
-                </a:solidFill>
-              </a:rPr>
-              <a:t>compass</a:t>
-            </a:r>
-            <a:endParaRPr lang="en-US" sz="800" dirty="0"/>
-          </a:p>
-        </p:txBody>
-      </p:sp>
-      <p:sp>
-        <p:nvSpPr>
-          <p:cNvPr id="11" name="Text 9"/>
+          <a:prstGeom prst="rect">
+            <a:avLst/>
+          </a:prstGeom>
+        </p:spPr>
+      </p:pic>
+      <p:sp>
+        <p:nvSpPr>
+          <p:cNvPr id="10" name="Text 7"/>
           <p:cNvSpPr/>
           <p:nvPr/>
         </p:nvSpPr>
@@ -1154,72 +1121,39 @@
           </a:p>
         </p:txBody>
       </p:sp>
-      <p:sp>
-        <p:nvSpPr>
-          <p:cNvPr id="12" name="Shape 10"/>
-          <p:cNvSpPr/>
-          <p:nvPr/>
-        </p:nvSpPr>
+      <p:pic>
+        <p:nvPicPr>
+          <p:cNvPr id="11" name="Image 1" descr="preencoded.png">    </p:cNvPr>
+          <p:cNvPicPr>
+            <a:picLocks noChangeAspect="1"/>
+          </p:cNvPicPr>
+          <p:nvPr/>
+        </p:nvPicPr>
+        <p:blipFill>
+          <a:blip r:embed="rId3">
+            <a:extLst>
+              <a:ext uri="{96DAC541-7B7A-43D3-8B79-37D633B846F1}">
+                <asvg:svgBlip xmlns:asvg="http://schemas.microsoft.com/office/drawing/2016/SVG/main" r:embed="rId4"/>
+              </a:ext>
+            </a:extLst>
+          </a:blip>
+          <a:stretch>
+            <a:fillRect/>
+          </a:stretch>
+        </p:blipFill>
         <p:spPr>
           <a:xfrm>
             <a:off x="4800600" y="3181350"/>
             <a:ext cx="685800" cy="685800"/>
           </a:xfrm>
-          <a:prstGeom prst="roundRect">
-            <a:avLst/>
-          </a:prstGeom>
-          <a:solidFill>
-            <a:srgbClr val="FFFFFF">
-              <a:alpha val="15000"/>
-            </a:srgbClr>
-          </a:solidFill>
-          <a:ln w="12700">
-            <a:solidFill>
-              <a:srgbClr val="FFFFFF"/>
-            </a:solidFill>
-            <a:prstDash val="dash"/>
-          </a:ln>
-        </p:spPr>
-      </p:sp>
-      <p:sp>
-        <p:nvSpPr>
-          <p:cNvPr id="13" name="Text 11"/>
-          <p:cNvSpPr/>
-          <p:nvPr/>
-        </p:nvSpPr>
-        <p:spPr>
-          <a:xfrm>
-            <a:off x="4800600" y="3181350"/>
-            <a:ext cx="685800" cy="685800"/>
-          </a:xfrm>
-          <a:prstGeom prst="rect">
-            <a:avLst/>
-          </a:prstGeom>
-          <a:noFill/>
-          <a:ln/>
-        </p:spPr>
-        <p:txBody>
-          <a:bodyPr wrap="square" rtlCol="0" anchor="ctr"/>
-          <a:lstStyle/>
-          <a:p>
-            <a:pPr algn="ctr" indent="0" marL="0">
-              <a:buNone/>
-            </a:pPr>
-            <a:r>
-              <a:rPr lang="en-US" sz="800" dirty="0">
-                <a:solidFill>
-                  <a:srgbClr val="FFFFFF"/>
-                </a:solidFill>
-              </a:rPr>
-              <a:t>tag</a:t>
-            </a:r>
-            <a:endParaRPr lang="en-US" sz="800" dirty="0"/>
-          </a:p>
-        </p:txBody>
-      </p:sp>
-      <p:sp>
-        <p:nvSpPr>
-          <p:cNvPr id="14" name="Text 12"/>
+          <a:prstGeom prst="rect">
+            <a:avLst/>
+          </a:prstGeom>
+        </p:spPr>
+      </p:pic>
+      <p:sp>
+        <p:nvSpPr>
+          <p:cNvPr id="12" name="Text 8"/>
           <p:cNvSpPr/>
           <p:nvPr/>
         </p:nvSpPr>
@@ -1259,72 +1193,39 @@
           </a:p>
         </p:txBody>
       </p:sp>
-      <p:sp>
-        <p:nvSpPr>
-          <p:cNvPr id="15" name="Shape 13"/>
-          <p:cNvSpPr/>
-          <p:nvPr/>
-        </p:nvSpPr>
+      <p:pic>
+        <p:nvPicPr>
+          <p:cNvPr id="13" name="Image 2" descr="preencoded.png">    </p:cNvPr>
+          <p:cNvPicPr>
+            <a:picLocks noChangeAspect="1"/>
+          </p:cNvPicPr>
+          <p:nvPr/>
+        </p:nvPicPr>
+        <p:blipFill>
+          <a:blip r:embed="rId5">
+            <a:extLst>
+              <a:ext uri="{96DAC541-7B7A-43D3-8B79-37D633B846F1}">
+                <asvg:svgBlip xmlns:asvg="http://schemas.microsoft.com/office/drawing/2016/SVG/main" r:embed="rId6"/>
+              </a:ext>
+            </a:extLst>
+          </a:blip>
+          <a:stretch>
+            <a:fillRect/>
+          </a:stretch>
+        </p:blipFill>
         <p:spPr>
           <a:xfrm>
             <a:off x="7670800" y="3181350"/>
             <a:ext cx="685800" cy="685800"/>
           </a:xfrm>
-          <a:prstGeom prst="roundRect">
-            <a:avLst/>
-          </a:prstGeom>
-          <a:solidFill>
-            <a:srgbClr val="FFFFFF">
-              <a:alpha val="15000"/>
-            </a:srgbClr>
-          </a:solidFill>
-          <a:ln w="12700">
-            <a:solidFill>
-              <a:srgbClr val="FFFFFF"/>
-            </a:solidFill>
-            <a:prstDash val="dash"/>
-          </a:ln>
-        </p:spPr>
-      </p:sp>
-      <p:sp>
-        <p:nvSpPr>
-          <p:cNvPr id="16" name="Text 14"/>
-          <p:cNvSpPr/>
-          <p:nvPr/>
-        </p:nvSpPr>
-        <p:spPr>
-          <a:xfrm>
-            <a:off x="7670800" y="3181350"/>
-            <a:ext cx="685800" cy="685800"/>
-          </a:xfrm>
-          <a:prstGeom prst="rect">
-            <a:avLst/>
-          </a:prstGeom>
-          <a:noFill/>
-          <a:ln/>
-        </p:spPr>
-        <p:txBody>
-          <a:bodyPr wrap="square" rtlCol="0" anchor="ctr"/>
-          <a:lstStyle/>
-          <a:p>
-            <a:pPr algn="ctr" indent="0" marL="0">
-              <a:buNone/>
-            </a:pPr>
-            <a:r>
-              <a:rPr lang="en-US" sz="800" dirty="0">
-                <a:solidFill>
-                  <a:srgbClr val="FFFFFF"/>
-                </a:solidFill>
-              </a:rPr>
-              <a:t>graduation-cap</a:t>
-            </a:r>
-            <a:endParaRPr lang="en-US" sz="800" dirty="0"/>
-          </a:p>
-        </p:txBody>
-      </p:sp>
-      <p:sp>
-        <p:nvSpPr>
-          <p:cNvPr id="17" name="Text 15"/>
+          <a:prstGeom prst="rect">
+            <a:avLst/>
+          </a:prstGeom>
+        </p:spPr>
+      </p:pic>
+      <p:sp>
+        <p:nvSpPr>
+          <p:cNvPr id="14" name="Text 9"/>
           <p:cNvSpPr/>
           <p:nvPr/>
         </p:nvSpPr>
@@ -1364,72 +1265,39 @@
           </a:p>
         </p:txBody>
       </p:sp>
-      <p:sp>
-        <p:nvSpPr>
-          <p:cNvPr id="18" name="Shape 16"/>
-          <p:cNvSpPr/>
-          <p:nvPr/>
-        </p:nvSpPr>
+      <p:pic>
+        <p:nvPicPr>
+          <p:cNvPr id="15" name="Image 3" descr="preencoded.png">    </p:cNvPr>
+          <p:cNvPicPr>
+            <a:picLocks noChangeAspect="1"/>
+          </p:cNvPicPr>
+          <p:nvPr/>
+        </p:nvPicPr>
+        <p:blipFill>
+          <a:blip r:embed="rId7">
+            <a:extLst>
+              <a:ext uri="{96DAC541-7B7A-43D3-8B79-37D633B846F1}">
+                <asvg:svgBlip xmlns:asvg="http://schemas.microsoft.com/office/drawing/2016/SVG/main" r:embed="rId8"/>
+              </a:ext>
+            </a:extLst>
+          </a:blip>
+          <a:stretch>
+            <a:fillRect/>
+          </a:stretch>
+        </p:blipFill>
         <p:spPr>
           <a:xfrm>
             <a:off x="1930400" y="5576062"/>
             <a:ext cx="685800" cy="685800"/>
           </a:xfrm>
-          <a:prstGeom prst="roundRect">
-            <a:avLst/>
-          </a:prstGeom>
-          <a:solidFill>
-            <a:srgbClr val="FFFFFF">
-              <a:alpha val="15000"/>
-            </a:srgbClr>
-          </a:solidFill>
-          <a:ln w="12700">
-            <a:solidFill>
-              <a:srgbClr val="FFFFFF"/>
-            </a:solidFill>
-            <a:prstDash val="dash"/>
-          </a:ln>
-        </p:spPr>
-      </p:sp>
-      <p:sp>
-        <p:nvSpPr>
-          <p:cNvPr id="19" name="Text 17"/>
-          <p:cNvSpPr/>
-          <p:nvPr/>
-        </p:nvSpPr>
-        <p:spPr>
-          <a:xfrm>
-            <a:off x="1930400" y="5576062"/>
-            <a:ext cx="685800" cy="685800"/>
-          </a:xfrm>
-          <a:prstGeom prst="rect">
-            <a:avLst/>
-          </a:prstGeom>
-          <a:noFill/>
-          <a:ln/>
-        </p:spPr>
-        <p:txBody>
-          <a:bodyPr wrap="square" rtlCol="0" anchor="ctr"/>
-          <a:lstStyle/>
-          <a:p>
-            <a:pPr algn="ctr" indent="0" marL="0">
-              <a:buNone/>
-            </a:pPr>
-            <a:r>
-              <a:rPr lang="en-US" sz="800" dirty="0">
-                <a:solidFill>
-                  <a:srgbClr val="FFFFFF"/>
-                </a:solidFill>
-              </a:rPr>
-              <a:t>book-open</a:t>
-            </a:r>
-            <a:endParaRPr lang="en-US" sz="800" dirty="0"/>
-          </a:p>
-        </p:txBody>
-      </p:sp>
-      <p:sp>
-        <p:nvSpPr>
-          <p:cNvPr id="20" name="Text 18"/>
+          <a:prstGeom prst="rect">
+            <a:avLst/>
+          </a:prstGeom>
+        </p:spPr>
+      </p:pic>
+      <p:sp>
+        <p:nvSpPr>
+          <p:cNvPr id="16" name="Text 10"/>
           <p:cNvSpPr/>
           <p:nvPr/>
         </p:nvSpPr>
@@ -1469,72 +1337,39 @@
           </a:p>
         </p:txBody>
       </p:sp>
-      <p:sp>
-        <p:nvSpPr>
-          <p:cNvPr id="21" name="Shape 19"/>
-          <p:cNvSpPr/>
-          <p:nvPr/>
-        </p:nvSpPr>
+      <p:pic>
+        <p:nvPicPr>
+          <p:cNvPr id="17" name="Image 4" descr="preencoded.png">    </p:cNvPr>
+          <p:cNvPicPr>
+            <a:picLocks noChangeAspect="1"/>
+          </p:cNvPicPr>
+          <p:nvPr/>
+        </p:nvPicPr>
+        <p:blipFill>
+          <a:blip r:embed="rId9">
+            <a:extLst>
+              <a:ext uri="{96DAC541-7B7A-43D3-8B79-37D633B846F1}">
+                <asvg:svgBlip xmlns:asvg="http://schemas.microsoft.com/office/drawing/2016/SVG/main" r:embed="rId10"/>
+              </a:ext>
+            </a:extLst>
+          </a:blip>
+          <a:stretch>
+            <a:fillRect/>
+          </a:stretch>
+        </p:blipFill>
         <p:spPr>
           <a:xfrm>
             <a:off x="4800600" y="5576062"/>
             <a:ext cx="685800" cy="685800"/>
           </a:xfrm>
-          <a:prstGeom prst="roundRect">
-            <a:avLst/>
-          </a:prstGeom>
-          <a:solidFill>
-            <a:srgbClr val="FFFFFF">
-              <a:alpha val="15000"/>
-            </a:srgbClr>
-          </a:solidFill>
-          <a:ln w="12700">
-            <a:solidFill>
-              <a:srgbClr val="FFFFFF"/>
-            </a:solidFill>
-            <a:prstDash val="dash"/>
-          </a:ln>
-        </p:spPr>
-      </p:sp>
-      <p:sp>
-        <p:nvSpPr>
-          <p:cNvPr id="22" name="Text 20"/>
-          <p:cNvSpPr/>
-          <p:nvPr/>
-        </p:nvSpPr>
-        <p:spPr>
-          <a:xfrm>
-            <a:off x="4800600" y="5576062"/>
-            <a:ext cx="685800" cy="685800"/>
-          </a:xfrm>
-          <a:prstGeom prst="rect">
-            <a:avLst/>
-          </a:prstGeom>
-          <a:noFill/>
-          <a:ln/>
-        </p:spPr>
-        <p:txBody>
-          <a:bodyPr wrap="square" rtlCol="0" anchor="ctr"/>
-          <a:lstStyle/>
-          <a:p>
-            <a:pPr algn="ctr" indent="0" marL="0">
-              <a:buNone/>
-            </a:pPr>
-            <a:r>
-              <a:rPr lang="en-US" sz="800" dirty="0">
-                <a:solidFill>
-                  <a:srgbClr val="FFFFFF"/>
-                </a:solidFill>
-              </a:rPr>
-              <a:t>life-buoy</a:t>
-            </a:r>
-            <a:endParaRPr lang="en-US" sz="800" dirty="0"/>
-          </a:p>
-        </p:txBody>
-      </p:sp>
-      <p:sp>
-        <p:nvSpPr>
-          <p:cNvPr id="23" name="Text 21"/>
+          <a:prstGeom prst="rect">
+            <a:avLst/>
+          </a:prstGeom>
+        </p:spPr>
+      </p:pic>
+      <p:sp>
+        <p:nvSpPr>
+          <p:cNvPr id="18" name="Text 11"/>
           <p:cNvSpPr/>
           <p:nvPr/>
         </p:nvSpPr>
@@ -1574,72 +1409,39 @@
           </a:p>
         </p:txBody>
       </p:sp>
-      <p:sp>
-        <p:nvSpPr>
-          <p:cNvPr id="24" name="Shape 22"/>
-          <p:cNvSpPr/>
-          <p:nvPr/>
-        </p:nvSpPr>
+      <p:pic>
+        <p:nvPicPr>
+          <p:cNvPr id="19" name="Image 5" descr="preencoded.png">    </p:cNvPr>
+          <p:cNvPicPr>
+            <a:picLocks noChangeAspect="1"/>
+          </p:cNvPicPr>
+          <p:nvPr/>
+        </p:nvPicPr>
+        <p:blipFill>
+          <a:blip r:embed="rId11">
+            <a:extLst>
+              <a:ext uri="{96DAC541-7B7A-43D3-8B79-37D633B846F1}">
+                <asvg:svgBlip xmlns:asvg="http://schemas.microsoft.com/office/drawing/2016/SVG/main" r:embed="rId12"/>
+              </a:ext>
+            </a:extLst>
+          </a:blip>
+          <a:stretch>
+            <a:fillRect/>
+          </a:stretch>
+        </p:blipFill>
         <p:spPr>
           <a:xfrm>
             <a:off x="7670800" y="5576062"/>
             <a:ext cx="685800" cy="685800"/>
           </a:xfrm>
-          <a:prstGeom prst="roundRect">
-            <a:avLst/>
-          </a:prstGeom>
-          <a:solidFill>
-            <a:srgbClr val="FFFFFF">
-              <a:alpha val="15000"/>
-            </a:srgbClr>
-          </a:solidFill>
-          <a:ln w="12700">
-            <a:solidFill>
-              <a:srgbClr val="FFFFFF"/>
-            </a:solidFill>
-            <a:prstDash val="dash"/>
-          </a:ln>
-        </p:spPr>
-      </p:sp>
-      <p:sp>
-        <p:nvSpPr>
-          <p:cNvPr id="25" name="Text 23"/>
-          <p:cNvSpPr/>
-          <p:nvPr/>
-        </p:nvSpPr>
-        <p:spPr>
-          <a:xfrm>
-            <a:off x="7670800" y="5576062"/>
-            <a:ext cx="685800" cy="685800"/>
-          </a:xfrm>
-          <a:prstGeom prst="rect">
-            <a:avLst/>
-          </a:prstGeom>
-          <a:noFill/>
-          <a:ln/>
-        </p:spPr>
-        <p:txBody>
-          <a:bodyPr wrap="square" rtlCol="0" anchor="ctr"/>
-          <a:lstStyle/>
-          <a:p>
-            <a:pPr algn="ctr" indent="0" marL="0">
-              <a:buNone/>
-            </a:pPr>
-            <a:r>
-              <a:rPr lang="en-US" sz="800" dirty="0">
-                <a:solidFill>
-                  <a:srgbClr val="FFFFFF"/>
-                </a:solidFill>
-              </a:rPr>
-              <a:t>bar-chart-3</a:t>
-            </a:r>
-            <a:endParaRPr lang="en-US" sz="800" dirty="0"/>
-          </a:p>
-        </p:txBody>
-      </p:sp>
-      <p:sp>
-        <p:nvSpPr>
-          <p:cNvPr id="26" name="Text 24"/>
+          <a:prstGeom prst="rect">
+            <a:avLst/>
+          </a:prstGeom>
+        </p:spPr>
+      </p:pic>
+      <p:sp>
+        <p:nvSpPr>
+          <p:cNvPr id="20" name="Text 12"/>
           <p:cNvSpPr/>
           <p:nvPr/>
         </p:nvSpPr>
